--- a/curso_es/pptx/S63.pptx
+++ b/curso_es/pptx/S63.pptx
@@ -3801,7 +3801,7 @@
                 </a:solidFill>
                 <a:latin typeface="Nunito Sans"/>
               </a:rPr>
-              <a:t>Kevin: «Los videojuegos deberían tener un límite de horas». Aitor: «Lo dices porque eres malísimo jugando».</a:t>
+              <a:t>Una chica: «Los videojuegos deberían tener un límite de horas». Un chico: «Lo dices porque eres malísima jugando».</a:t>
             </a:r>
           </a:p>
         </p:txBody>
@@ -3849,7 +3849,7 @@
                 </a:solidFill>
                 <a:latin typeface="Nunito Sans"/>
               </a:rPr>
-              <a:t>Aitor ataca a Kevin, no a su idea: es un ataque a la persona (sesión 14).</a:t>
+              <a:t>El chico ataca a la chica, no a su idea: es un ataque a la persona (sesión 14).</a:t>
             </a:r>
           </a:p>
           <a:p>
@@ -3874,7 +3874,7 @@
                 </a:solidFill>
                 <a:latin typeface="Nunito Sans"/>
               </a:rPr>
-              <a:t>Sin ataque, Aitor podría decir: «No lo veo así: prefiero que cada familia decida su límite».</a:t>
+              <a:t>Sin ataque, el chico podría decir: «No lo veo así: prefiero que cada familia decida su límite».</a:t>
             </a:r>
           </a:p>
           <a:p>
@@ -3899,7 +3899,7 @@
                 </a:solidFill>
                 <a:latin typeface="Nunito Sans"/>
               </a:rPr>
-              <a:t>Ahora hay una razón que Kevin puede pensar y contestar.</a:t>
+              <a:t>Ahora hay una razón que la chica puede pensar y contestar.</a:t>
             </a:r>
           </a:p>
           <a:p>
@@ -4110,7 +4110,7 @@
                 </a:solidFill>
                 <a:latin typeface="Nunito Sans"/>
               </a:rPr>
-              <a:t>Iker: «El sábado vamos a ver la peli nueva». Naiara: «Mira, no la estrenan hasta el viernes que viene». Iker lo comprueba: «Tienes razón. ¿Bolera, entonces?».</a:t>
+              <a:t>Un chico: «El sábado vamos a ver la peli nueva». Una chica: «Mira, no la estrenan hasta el viernes que viene». El chico lo comprueba: «Tienes razón. ¿Bolera, entonces?».</a:t>
             </a:r>
           </a:p>
         </p:txBody>
@@ -4158,7 +4158,7 @@
                 </a:solidFill>
                 <a:latin typeface="Nunito Sans"/>
               </a:rPr>
-              <a:t>Naiara no ataca: corrige un dato y da una razón que se puede comprobar.</a:t>
+              <a:t>La chica no ataca: corrige un dato y da una razón que se puede comprobar.</a:t>
             </a:r>
           </a:p>
           <a:p>
@@ -4183,7 +4183,7 @@
                 </a:solidFill>
                 <a:latin typeface="Nunito Sans"/>
               </a:rPr>
-              <a:t>Iker lo comprueba y cambia de idea.</a:t>
+              <a:t>El chico lo comprueba y cambia de idea.</a:t>
             </a:r>
           </a:p>
           <a:p>
@@ -4208,7 +4208,7 @@
                 </a:solidFill>
                 <a:latin typeface="Nunito Sans"/>
               </a:rPr>
-              <a:t>¿Ha perdido Iker? No: ahora sabe algo que no sabía.</a:t>
+              <a:t>¿Ha perdido el chico? No: ahora sabe algo que no sabía.</a:t>
             </a:r>
           </a:p>
           <a:p>
@@ -4419,7 +4419,7 @@
                 </a:solidFill>
                 <a:latin typeface="Nunito Sans"/>
               </a:rPr>
-              <a:t>Chen propone ir en bici a la playa. Maialen: «No me convence: se tarda más de una hora y hemos quedado en media». Chen: «¡Siempre me atacas!».</a:t>
+              <a:t>Un chico propone ir en bici a la playa. Una chica: «No me convence: se tarda más de una hora y hemos quedado en media». El chico: «¡Siempre me atacas!».</a:t>
             </a:r>
           </a:p>
         </p:txBody>
@@ -4467,7 +4467,7 @@
                 </a:solidFill>
                 <a:latin typeface="Nunito Sans"/>
               </a:rPr>
-              <a:t>Chen se siente atacado. ¿Le ha atacado Maialen?</a:t>
+              <a:t>Ese chico se siente atacado. ¿Le ha atacado la chica?</a:t>
             </a:r>
           </a:p>
           <a:p>
@@ -4492,7 +4492,7 @@
                 </a:solidFill>
                 <a:latin typeface="Nunito Sans"/>
               </a:rPr>
-              <a:t>Parece que sí: Maialen dice que el plan de Chen no le convence.</a:t>
+              <a:t>Parece que sí: la chica dice que el plan del chico no le convence.</a:t>
             </a:r>
           </a:p>
           <a:p>
@@ -4517,7 +4517,7 @@
                 </a:solidFill>
                 <a:latin typeface="Nunito Sans"/>
               </a:rPr>
-              <a:t>Pero ¿de qué habla? Del plan y del tiempo, no de cómo es Chen.</a:t>
+              <a:t>Pero ¿de qué habla? Del plan y del tiempo, no de cómo es el chico.</a:t>
             </a:r>
           </a:p>
           <a:p>
@@ -6868,7 +6868,7 @@
                 </a:solidFill>
                 <a:latin typeface="Nunito Sans"/>
               </a:rPr>
-              <a:t>En una cena familiar, tu tío y tu prima hablan de fútbol. Él levanta la voz. Ella se ríe de él. Al final nadie recuerda de qué hablaban.</a:t>
+              <a:t>En una cena familiar, el tío y la prima de un chico hablan de fútbol. Él levanta la voz. Ella se ríe de él. Al final nadie recuerda de qué hablaban.</a:t>
             </a:r>
           </a:p>
         </p:txBody>
